--- a/data/deep_dives/carteira_real_moto_pecas_per_fundo_de_invest_3ad00d58/exports/documentary_comparison.pptx
+++ b/data/deep_dives/carteira_real_moto_pecas_per_fundo_de_invest_3ad00d58/exports/documentary_comparison.pptx
@@ -4286,7 +4286,7 @@
                       <a:r>
                         <a:rPr sz="1300" b="1">
                           <a:solidFill>
-                            <a:srgbClr val="1F1F1F"/>
+                            <a:srgbClr val="FFFFFF"/>
                           </a:solidFill>
                           <a:latin typeface="Calibri"/>
                         </a:rPr>
@@ -4296,7 +4296,7 @@
                   </a:txBody>
                   <a:tcPr marL="91440" marR="91440" marT="41148" marB="41148" anchor="ctr">
                     <a:solidFill>
-                      <a:srgbClr val="EC7000"/>
+                      <a:srgbClr val="FF6200"/>
                     </a:solidFill>
                     <a:lnL>
                       <a:noFill/>
@@ -4335,7 +4335,7 @@
                       <a:r>
                         <a:rPr sz="1300" b="1">
                           <a:solidFill>
-                            <a:srgbClr val="1F1F1F"/>
+                            <a:srgbClr val="FFFFFF"/>
                           </a:solidFill>
                           <a:latin typeface="Calibri"/>
                         </a:rPr>
@@ -4345,7 +4345,7 @@
                   </a:txBody>
                   <a:tcPr marL="91440" marR="91440" marT="41148" marB="41148" anchor="ctr">
                     <a:solidFill>
-                      <a:srgbClr val="EC7000"/>
+                      <a:srgbClr val="FF6200"/>
                     </a:solidFill>
                     <a:lnL>
                       <a:noFill/>
@@ -4533,7 +4533,7 @@
                           </a:solidFill>
                           <a:latin typeface="Calibri"/>
                         </a:rPr>
-                        <a:t>Não localizado nas fontes acessíveis desta leitura</a:t>
+                        <a:t>-</a:t>
                       </a:r>
                     </a:p>
                   </a:txBody>
@@ -4629,7 +4629,7 @@
                           </a:solidFill>
                           <a:latin typeface="Calibri"/>
                         </a:rPr>
-                        <a:t>Não localizado nas fontes acessíveis desta leitura</a:t>
+                        <a:t>-</a:t>
                       </a:r>
                     </a:p>
                   </a:txBody>
@@ -5123,7 +5123,7 @@
                       <a:r>
                         <a:rPr sz="1300" b="1">
                           <a:solidFill>
-                            <a:srgbClr val="1F1F1F"/>
+                            <a:srgbClr val="FFFFFF"/>
                           </a:solidFill>
                           <a:latin typeface="Calibri"/>
                         </a:rPr>
@@ -5133,7 +5133,7 @@
                   </a:txBody>
                   <a:tcPr marL="91440" marR="91440" marT="41148" marB="41148" anchor="ctr">
                     <a:solidFill>
-                      <a:srgbClr val="EC7000"/>
+                      <a:srgbClr val="FF6200"/>
                     </a:solidFill>
                     <a:lnL>
                       <a:noFill/>
@@ -5172,7 +5172,7 @@
                       <a:r>
                         <a:rPr sz="1300" b="1">
                           <a:solidFill>
-                            <a:srgbClr val="1F1F1F"/>
+                            <a:srgbClr val="FFFFFF"/>
                           </a:solidFill>
                           <a:latin typeface="Calibri"/>
                         </a:rPr>
@@ -5182,7 +5182,7 @@
                   </a:txBody>
                   <a:tcPr marL="91440" marR="91440" marT="41148" marB="41148" anchor="ctr">
                     <a:solidFill>
-                      <a:srgbClr val="EC7000"/>
+                      <a:srgbClr val="FF6200"/>
                     </a:solidFill>
                     <a:lnL>
                       <a:noFill/>
@@ -5702,7 +5702,7 @@
                           </a:solidFill>
                           <a:latin typeface="Calibri"/>
                         </a:rPr>
-                        <a:t>Não localizado nas fontes acessíveis desta leitura</a:t>
+                        <a:t>-</a:t>
                       </a:r>
                     </a:p>
                   </a:txBody>
@@ -6004,7 +6004,7 @@
                       <a:r>
                         <a:rPr sz="1300" b="1">
                           <a:solidFill>
-                            <a:srgbClr val="1F1F1F"/>
+                            <a:srgbClr val="FFFFFF"/>
                           </a:solidFill>
                           <a:latin typeface="Calibri"/>
                         </a:rPr>
@@ -6014,7 +6014,7 @@
                   </a:txBody>
                   <a:tcPr marL="91440" marR="91440" marT="41148" marB="41148" anchor="ctr">
                     <a:solidFill>
-                      <a:srgbClr val="EC7000"/>
+                      <a:srgbClr val="FF6200"/>
                     </a:solidFill>
                     <a:lnL>
                       <a:noFill/>
@@ -6053,7 +6053,7 @@
                       <a:r>
                         <a:rPr sz="1300" b="1">
                           <a:solidFill>
-                            <a:srgbClr val="1F1F1F"/>
+                            <a:srgbClr val="FFFFFF"/>
                           </a:solidFill>
                           <a:latin typeface="Calibri"/>
                         </a:rPr>
@@ -6063,7 +6063,7 @@
                   </a:txBody>
                   <a:tcPr marL="91440" marR="91440" marT="41148" marB="41148" anchor="ctr">
                     <a:solidFill>
-                      <a:srgbClr val="EC7000"/>
+                      <a:srgbClr val="FF6200"/>
                     </a:solidFill>
                     <a:lnL>
                       <a:noFill/>
@@ -6251,7 +6251,7 @@
                           </a:solidFill>
                           <a:latin typeface="Calibri"/>
                         </a:rPr>
-                        <a:t>Não localizado nas fontes acessíveis desta leitura</a:t>
+                        <a:t>-</a:t>
                       </a:r>
                     </a:p>
                   </a:txBody>
@@ -6561,7 +6561,7 @@
                           </a:solidFill>
                           <a:latin typeface="Calibri"/>
                         </a:rPr>
-                        <a:t>Não localizado nas fontes acessíveis desta leitura</a:t>
+                        <a:t>-</a:t>
                       </a:r>
                     </a:p>
                   </a:txBody>
@@ -6659,7 +6659,7 @@
                           </a:solidFill>
                           <a:latin typeface="Calibri"/>
                         </a:rPr>
-                        <a:t>Não localizado nas fontes acessíveis desta leitura</a:t>
+                        <a:t>-</a:t>
                       </a:r>
                     </a:p>
                   </a:txBody>
@@ -6863,7 +6863,7 @@
                       <a:r>
                         <a:rPr sz="1300" b="1">
                           <a:solidFill>
-                            <a:srgbClr val="1F1F1F"/>
+                            <a:srgbClr val="FFFFFF"/>
                           </a:solidFill>
                           <a:latin typeface="Calibri"/>
                         </a:rPr>
@@ -6873,7 +6873,7 @@
                   </a:txBody>
                   <a:tcPr marL="91440" marR="91440" marT="41148" marB="41148" anchor="ctr">
                     <a:solidFill>
-                      <a:srgbClr val="EC7000"/>
+                      <a:srgbClr val="FF6200"/>
                     </a:solidFill>
                     <a:lnL>
                       <a:noFill/>
@@ -6912,7 +6912,7 @@
                       <a:r>
                         <a:rPr sz="1300" b="1">
                           <a:solidFill>
-                            <a:srgbClr val="1F1F1F"/>
+                            <a:srgbClr val="FFFFFF"/>
                           </a:solidFill>
                           <a:latin typeface="Calibri"/>
                         </a:rPr>
@@ -6922,7 +6922,7 @@
                   </a:txBody>
                   <a:tcPr marL="91440" marR="91440" marT="41148" marB="41148" anchor="ctr">
                     <a:solidFill>
-                      <a:srgbClr val="EC7000"/>
+                      <a:srgbClr val="FF6200"/>
                     </a:solidFill>
                     <a:lnL>
                       <a:noFill/>
@@ -7110,7 +7110,7 @@
                           </a:solidFill>
                           <a:latin typeface="Calibri"/>
                         </a:rPr>
-                        <a:t>Spread final sênior/mezanino não localizado; requer suplementos próprios</a:t>
+                        <a:t>-</a:t>
                       </a:r>
                     </a:p>
                   </a:txBody>
@@ -7304,7 +7304,7 @@
                           </a:solidFill>
                           <a:latin typeface="Calibri"/>
                         </a:rPr>
-                        <a:t>Não localizado nas fontes acessíveis desta leitura</a:t>
+                        <a:t>-</a:t>
                       </a:r>
                     </a:p>
                   </a:txBody>
@@ -7508,7 +7508,7 @@
                       <a:r>
                         <a:rPr sz="1300" b="1">
                           <a:solidFill>
-                            <a:srgbClr val="1F1F1F"/>
+                            <a:srgbClr val="FFFFFF"/>
                           </a:solidFill>
                           <a:latin typeface="Calibri"/>
                         </a:rPr>
@@ -7518,7 +7518,7 @@
                   </a:txBody>
                   <a:tcPr marL="91440" marR="91440" marT="41148" marB="41148" anchor="ctr">
                     <a:solidFill>
-                      <a:srgbClr val="EC7000"/>
+                      <a:srgbClr val="FF6200"/>
                     </a:solidFill>
                     <a:lnL>
                       <a:noFill/>
@@ -7557,7 +7557,7 @@
                       <a:r>
                         <a:rPr sz="1300" b="1">
                           <a:solidFill>
-                            <a:srgbClr val="1F1F1F"/>
+                            <a:srgbClr val="FFFFFF"/>
                           </a:solidFill>
                           <a:latin typeface="Calibri"/>
                         </a:rPr>
@@ -7567,7 +7567,7 @@
                   </a:txBody>
                   <a:tcPr marL="91440" marR="91440" marT="41148" marB="41148" anchor="ctr">
                     <a:solidFill>
-                      <a:srgbClr val="EC7000"/>
+                      <a:srgbClr val="FF6200"/>
                     </a:solidFill>
                     <a:lnL>
                       <a:noFill/>
@@ -7659,7 +7659,7 @@
                           </a:solidFill>
                           <a:latin typeface="Calibri"/>
                         </a:rPr>
-                        <a:t>Não localizado nas fontes acessíveis desta leitura</a:t>
+                        <a:t>-</a:t>
                       </a:r>
                     </a:p>
                   </a:txBody>
@@ -7755,7 +7755,7 @@
                           </a:solidFill>
                           <a:latin typeface="Calibri"/>
                         </a:rPr>
-                        <a:t>Não localizado nas fontes acessíveis desta leitura</a:t>
+                        <a:t>-</a:t>
                       </a:r>
                     </a:p>
                   </a:txBody>
@@ -7853,7 +7853,7 @@
                           </a:solidFill>
                           <a:latin typeface="Calibri"/>
                         </a:rPr>
-                        <a:t>Não localizado nas fontes acessíveis desta leitura</a:t>
+                        <a:t>-</a:t>
                       </a:r>
                     </a:p>
                   </a:txBody>
@@ -8057,7 +8057,7 @@
                       <a:r>
                         <a:rPr sz="1300" b="1">
                           <a:solidFill>
-                            <a:srgbClr val="1F1F1F"/>
+                            <a:srgbClr val="FFFFFF"/>
                           </a:solidFill>
                           <a:latin typeface="Calibri"/>
                         </a:rPr>
@@ -8067,7 +8067,7 @@
                   </a:txBody>
                   <a:tcPr marL="91440" marR="91440" marT="41148" marB="41148" anchor="ctr">
                     <a:solidFill>
-                      <a:srgbClr val="EC7000"/>
+                      <a:srgbClr val="FF6200"/>
                     </a:solidFill>
                     <a:lnL>
                       <a:noFill/>
@@ -8106,7 +8106,7 @@
                       <a:r>
                         <a:rPr sz="1300" b="1">
                           <a:solidFill>
-                            <a:srgbClr val="1F1F1F"/>
+                            <a:srgbClr val="FFFFFF"/>
                           </a:solidFill>
                           <a:latin typeface="Calibri"/>
                         </a:rPr>
@@ -8116,7 +8116,7 @@
                   </a:txBody>
                   <a:tcPr marL="91440" marR="91440" marT="41148" marB="41148" anchor="ctr">
                     <a:solidFill>
-                      <a:srgbClr val="EC7000"/>
+                      <a:srgbClr val="FF6200"/>
                     </a:solidFill>
                     <a:lnL>
                       <a:noFill/>
@@ -8402,7 +8402,7 @@
                           </a:solidFill>
                           <a:latin typeface="Calibri"/>
                         </a:rPr>
-                        <a:t>Incluída na administração; taxa própria não individualizada</a:t>
+                        <a:t>Incluída na administração</a:t>
                       </a:r>
                     </a:p>
                   </a:txBody>
@@ -8606,7 +8606,7 @@
                       <a:r>
                         <a:rPr sz="1300" b="1">
                           <a:solidFill>
-                            <a:srgbClr val="1F1F1F"/>
+                            <a:srgbClr val="FFFFFF"/>
                           </a:solidFill>
                           <a:latin typeface="Calibri"/>
                         </a:rPr>
@@ -8616,7 +8616,7 @@
                   </a:txBody>
                   <a:tcPr marL="91440" marR="91440" marT="41148" marB="41148" anchor="ctr">
                     <a:solidFill>
-                      <a:srgbClr val="EC7000"/>
+                      <a:srgbClr val="FF6200"/>
                     </a:solidFill>
                     <a:lnL>
                       <a:noFill/>
@@ -8655,7 +8655,7 @@
                       <a:r>
                         <a:rPr sz="1300" b="1">
                           <a:solidFill>
-                            <a:srgbClr val="1F1F1F"/>
+                            <a:srgbClr val="FFFFFF"/>
                           </a:solidFill>
                           <a:latin typeface="Calibri"/>
                         </a:rPr>
@@ -8665,7 +8665,7 @@
                   </a:txBody>
                   <a:tcPr marL="91440" marR="91440" marT="41148" marB="41148" anchor="ctr">
                     <a:solidFill>
-                      <a:srgbClr val="EC7000"/>
+                      <a:srgbClr val="FF6200"/>
                     </a:solidFill>
                     <a:lnL>
                       <a:noFill/>
@@ -8779,29 +8779,7 @@
                           </a:solidFill>
                           <a:latin typeface="Calibri"/>
                         </a:rPr>
-                        <a:t>Direitos creditórios / PL e cotas subordinadas / PL; validar ativo elegível, subclasses e fórmula</a:t>
-                      </a:r>
-                    </a:p>
-                    <a:p>
-                      <a:pPr algn="ctr">
-                        <a:lnSpc>
-                          <a:spcPct val="100000"/>
-                        </a:lnSpc>
-                        <a:spcBef>
-                          <a:spcPts val="0"/>
-                        </a:spcBef>
-                        <a:spcAft>
-                          <a:spcPts val="0"/>
-                        </a:spcAft>
-                      </a:pPr>
-                      <a:r>
-                        <a:rPr sz="1300" b="0">
-                          <a:solidFill>
-                            <a:srgbClr val="1F1F1F"/>
-                          </a:solidFill>
-                          <a:latin typeface="Calibri"/>
-                        </a:rPr>
-                        <a:t>contratual</a:t>
+                        <a:t>Direitos creditórios / PL e cotas subordinadas / PL</a:t>
                       </a:r>
                     </a:p>
                   </a:txBody>
@@ -9135,7 +9113,7 @@
                           </a:solidFill>
                           <a:latin typeface="Calibri"/>
                         </a:rPr>
-                        <a:t>Sem competência IME carregada em cache local</a:t>
+                        <a:t>-</a:t>
                       </a:r>
                     </a:p>
                   </a:txBody>
